--- a/index/designs/y9-l8/l6-listening-characters/l6-listening-characters.pptx
+++ b/index/designs/y9-l8/l6-listening-characters/l6-listening-characters.pptx
@@ -2407,7 +2407,7 @@
                 <a:ea typeface="Noto Sans SC" pitchFamily="34" charset="-122"/>
                 <a:cs typeface="Noto Sans SC" pitchFamily="34" charset="-120"/>
               </a:rPr>
-              <a:t>CD Tracks 30 &amp; 32</a:t>
+              <a:t>Tracks 30 &amp; 32</a:t>
             </a:r>
             <a:endParaRPr lang="en-US" sz="1100" dirty="0"/>
           </a:p>
@@ -17477,7 +17477,7 @@
                 <a:ea typeface="Noto Serif SC" pitchFamily="34" charset="-122"/>
                 <a:cs typeface="Noto Serif SC" pitchFamily="34" charset="-120"/>
               </a:rPr>
-              <a:t>(p.73, CD Track 30)</a:t>
+              <a:t>(p.73, Track 30)</a:t>
             </a:r>
             <a:endParaRPr lang="en-US" sz="2100" dirty="0"/>
           </a:p>
@@ -17627,7 +17627,7 @@
                 <a:ea typeface="Noto Sans SC" pitchFamily="34" charset="-122"/>
                 <a:cs typeface="Noto Sans SC" pitchFamily="34" charset="-120"/>
               </a:rPr>
-              <a:t>▶ CD Track 30</a:t>
+              <a:t>▶ Track 30</a:t>
             </a:r>
             <a:endParaRPr lang="en-US" sz="950" dirty="0"/>
           </a:p>
@@ -19010,7 +19010,7 @@
                 <a:ea typeface="Noto Serif SC" pitchFamily="34" charset="-122"/>
                 <a:cs typeface="Noto Serif SC" pitchFamily="34" charset="-120"/>
               </a:rPr>
-              <a:t>(p.78, CD Track 32)</a:t>
+              <a:t>(p.78, Track 32)</a:t>
             </a:r>
             <a:endParaRPr lang="en-US" sz="2000" dirty="0"/>
           </a:p>
@@ -19160,7 +19160,7 @@
                 <a:ea typeface="Noto Sans SC" pitchFamily="34" charset="-122"/>
                 <a:cs typeface="Noto Sans SC" pitchFamily="34" charset="-120"/>
               </a:rPr>
-              <a:t>▶ CD Track 32</a:t>
+              <a:t>▶ Track 32</a:t>
             </a:r>
             <a:endParaRPr lang="en-US" sz="900" dirty="0"/>
           </a:p>

--- a/index/designs/y9-l8/l6-listening-characters/l6-listening-characters.pptx
+++ b/index/designs/y9-l8/l6-listening-characters/l6-listening-characters.pptx
@@ -2217,9 +2217,6 @@
               </a:rPr>
               <a:t>⏱ </a:t>
             </a:r>
-            <a:pPr algn="ctr" indent="0" marL="0">
-              <a:buNone/>
-            </a:pPr>
             <a:r>
               <a:rPr lang="en-US" sz="1100" b="1" dirty="0">
                 <a:solidFill>
@@ -2306,9 +2303,6 @@
               </a:rPr>
               <a:t>📚 </a:t>
             </a:r>
-            <a:pPr algn="ctr" indent="0" marL="0">
-              <a:buNone/>
-            </a:pPr>
             <a:r>
               <a:rPr lang="en-US" sz="1100" b="1" dirty="0">
                 <a:solidFill>
@@ -2395,9 +2389,6 @@
               </a:rPr>
               <a:t>🎧 </a:t>
             </a:r>
-            <a:pPr algn="ctr" indent="0" marL="0">
-              <a:buNone/>
-            </a:pPr>
             <a:r>
               <a:rPr lang="en-US" sz="1100" b="1" dirty="0">
                 <a:solidFill>
@@ -2484,9 +2475,6 @@
               </a:rPr>
               <a:t>🀄 </a:t>
             </a:r>
-            <a:pPr algn="ctr" indent="0" marL="0">
-              <a:buNone/>
-            </a:pPr>
             <a:r>
               <a:rPr lang="en-US" sz="1100" b="1" dirty="0">
                 <a:solidFill>
@@ -4140,12 +4128,6 @@
               </a:rPr>
               <a:t>Display all </a:t>
             </a:r>
-            <a:pPr algn="l" indent="0" marL="0">
-              <a:lnSpc>
-                <a:spcPts val="1330"/>
-              </a:lnSpc>
-              <a:buNone/>
-            </a:pPr>
             <a:r>
               <a:rPr lang="en-US" sz="950" b="1" dirty="0">
                 <a:solidFill>
@@ -4157,12 +4139,6 @@
               </a:rPr>
               <a:t>12 characters</a:t>
             </a:r>
-            <a:pPr algn="l" indent="0" marL="0">
-              <a:lnSpc>
-                <a:spcPts val="1330"/>
-              </a:lnSpc>
-              <a:buNone/>
-            </a:pPr>
             <a:r>
               <a:rPr lang="en-US" sz="950" dirty="0">
                 <a:solidFill>
@@ -4417,12 +4393,6 @@
               </a:rPr>
               <a:t>All characters hidden.</a:t>
             </a:r>
-            <a:pPr algn="ctr" indent="0" marL="0">
-              <a:lnSpc>
-                <a:spcPts val="1330"/>
-              </a:lnSpc>
-              <a:buNone/>
-            </a:pPr>
             <a:r>
               <a:rPr lang="en-US" sz="950" dirty="0">
                 <a:solidFill>
@@ -4590,12 +4560,6 @@
               </a:rPr>
               <a:t>Teacher projects one </a:t>
             </a:r>
-            <a:pPr algn="l" indent="0" marL="0">
-              <a:lnSpc>
-                <a:spcPts val="1330"/>
-              </a:lnSpc>
-              <a:buNone/>
-            </a:pPr>
             <a:r>
               <a:rPr lang="en-US" sz="950" b="1" dirty="0">
                 <a:solidFill>
@@ -4607,12 +4571,6 @@
               </a:rPr>
               <a:t>pinyin</a:t>
             </a:r>
-            <a:pPr algn="l" indent="0" marL="0">
-              <a:lnSpc>
-                <a:spcPts val="1330"/>
-              </a:lnSpc>
-              <a:buNone/>
-            </a:pPr>
             <a:r>
               <a:rPr lang="en-US" sz="950" dirty="0">
                 <a:solidFill>
@@ -4624,12 +4582,6 @@
               </a:rPr>
               <a:t> at a time with </a:t>
             </a:r>
-            <a:pPr algn="l" indent="0" marL="0">
-              <a:lnSpc>
-                <a:spcPts val="1330"/>
-              </a:lnSpc>
-              <a:buNone/>
-            </a:pPr>
             <a:r>
               <a:rPr lang="en-US" sz="950" b="1" dirty="0">
                 <a:solidFill>
@@ -4641,12 +4593,6 @@
               </a:rPr>
               <a:t>5-sec countdown</a:t>
             </a:r>
-            <a:pPr algn="l" indent="0" marL="0">
-              <a:lnSpc>
-                <a:spcPts val="1330"/>
-              </a:lnSpc>
-              <a:buNone/>
-            </a:pPr>
             <a:r>
               <a:rPr lang="en-US" sz="950" dirty="0">
                 <a:solidFill>
@@ -6355,12 +6301,6 @@
               </a:rPr>
               <a:t>Teacher note:</a:t>
             </a:r>
-            <a:pPr algn="l" indent="0" marL="0">
-              <a:lnSpc>
-                <a:spcPts val="1190"/>
-              </a:lnSpc>
-              <a:buNone/>
-            </a:pPr>
             <a:r>
               <a:rPr lang="en-US" sz="850" dirty="0">
                 <a:solidFill>
@@ -6828,12 +6768,6 @@
               </a:rPr>
               <a:t>汉字 only</a:t>
             </a:r>
-            <a:pPr algn="l" indent="0" marL="0">
-              <a:lnSpc>
-                <a:spcPts val="1190"/>
-              </a:lnSpc>
-              <a:buNone/>
-            </a:pPr>
             <a:r>
               <a:rPr lang="en-US" sz="850" dirty="0">
                 <a:solidFill>
@@ -9070,12 +9004,6 @@
               </a:rPr>
               <a:t>Project all twelve as a grid. </a:t>
             </a:r>
-            <a:pPr algn="l" indent="0" marL="0">
-              <a:lnSpc>
-                <a:spcPts val="1330"/>
-              </a:lnSpc>
-              <a:buNone/>
-            </a:pPr>
             <a:r>
               <a:rPr lang="en-US" sz="950" b="1" dirty="0">
                 <a:solidFill>
@@ -9087,12 +9015,6 @@
               </a:rPr>
               <a:t>Cold call</a:t>
             </a:r>
-            <a:pPr algn="l" indent="0" marL="0">
-              <a:lnSpc>
-                <a:spcPts val="1330"/>
-              </a:lnSpc>
-              <a:buNone/>
-            </a:pPr>
             <a:r>
               <a:rPr lang="en-US" sz="950" dirty="0">
                 <a:solidFill>
@@ -9254,9 +9176,6 @@
               </a:rPr>
               <a:t>＿</a:t>
             </a:r>
-            <a:pPr algn="l" indent="0" marL="0">
-              <a:buNone/>
-            </a:pPr>
             <a:r>
               <a:rPr lang="en-US" sz="1700" b="1" dirty="0">
                 <a:solidFill>
@@ -9343,9 +9262,6 @@
               </a:rPr>
               <a:t>＿</a:t>
             </a:r>
-            <a:pPr algn="l" indent="0" marL="0">
-              <a:buNone/>
-            </a:pPr>
             <a:r>
               <a:rPr lang="en-US" sz="1700" b="1" dirty="0">
                 <a:solidFill>
@@ -9432,9 +9348,6 @@
               </a:rPr>
               <a:t>三＿</a:t>
             </a:r>
-            <a:pPr algn="l" indent="0" marL="0">
-              <a:buNone/>
-            </a:pPr>
             <a:r>
               <a:rPr lang="en-US" sz="1700" b="1" dirty="0">
                 <a:solidFill>
@@ -9488,12 +9401,6 @@
               </a:rPr>
               <a:t>Class </a:t>
             </a:r>
-            <a:pPr algn="l" indent="0" marL="0">
-              <a:lnSpc>
-                <a:spcPts val="1330"/>
-              </a:lnSpc>
-              <a:buNone/>
-            </a:pPr>
             <a:r>
               <a:rPr lang="en-US" sz="950" b="1" dirty="0">
                 <a:solidFill>
@@ -9505,12 +9412,6 @@
               </a:rPr>
               <a:t>chorally</a:t>
             </a:r>
-            <a:pPr algn="l" indent="0" marL="0">
-              <a:lnSpc>
-                <a:spcPts val="1330"/>
-              </a:lnSpc>
-              <a:buNone/>
-            </a:pPr>
             <a:r>
               <a:rPr lang="en-US" sz="950" dirty="0">
                 <a:solidFill>
@@ -9617,12 +9518,6 @@
               </a:rPr>
               <a:t>今天我们要做两个听力练习</a:t>
             </a:r>
-            <a:pPr algn="l" indent="0" marL="0">
-              <a:lnSpc>
-                <a:spcPts val="1680"/>
-              </a:lnSpc>
-              <a:buNone/>
-            </a:pPr>
             <a:r>
               <a:rPr lang="en-US" sz="1200" dirty="0">
                 <a:solidFill>
@@ -12897,12 +12792,6 @@
               </a:rPr>
               <a:t>Teacher: </a:t>
             </a:r>
-            <a:pPr algn="l" indent="0" marL="0">
-              <a:lnSpc>
-                <a:spcPts val="1470"/>
-              </a:lnSpc>
-              <a:buNone/>
-            </a:pPr>
             <a:r>
               <a:rPr lang="en-US" sz="1050" dirty="0">
                 <a:solidFill>
@@ -15215,9 +15104,6 @@
               </a:rPr>
               <a:t>今天的游戏会用到这些量词</a:t>
             </a:r>
-            <a:pPr algn="l" indent="0" marL="0">
-              <a:buNone/>
-            </a:pPr>
             <a:r>
               <a:rPr lang="en-US" sz="1200" dirty="0">
                 <a:solidFill>
@@ -15750,12 +15636,6 @@
               </a:rPr>
               <a:t>Teacher points to 米, 田, 鸟, and 天 on the projector (no pinyin shown), one at a time. Class calls out the </a:t>
             </a:r>
-            <a:pPr algn="l" indent="0" marL="0">
-              <a:lnSpc>
-                <a:spcPts val="1595"/>
-              </a:lnSpc>
-              <a:buNone/>
-            </a:pPr>
             <a:r>
               <a:rPr lang="en-US" sz="1100" b="1" dirty="0">
                 <a:solidFill>
@@ -15767,12 +15647,6 @@
               </a:rPr>
               <a:t>pinyin</a:t>
             </a:r>
-            <a:pPr algn="l" indent="0" marL="0">
-              <a:lnSpc>
-                <a:spcPts val="1595"/>
-              </a:lnSpc>
-              <a:buNone/>
-            </a:pPr>
             <a:r>
               <a:rPr lang="en-US" sz="1100" dirty="0">
                 <a:solidFill>
@@ -16008,9 +15882,6 @@
               </a:rPr>
               <a:t>Sam, 一＿书？ </a:t>
             </a:r>
-            <a:pPr algn="l" indent="0" marL="0">
-              <a:buNone/>
-            </a:pPr>
             <a:r>
               <a:rPr lang="en-US" sz="1300" b="1" dirty="0">
                 <a:solidFill>
@@ -16061,9 +15932,6 @@
               </a:rPr>
               <a:t>Priya, 一＿铅笔？ </a:t>
             </a:r>
-            <a:pPr algn="l" indent="0" marL="0">
-              <a:buNone/>
-            </a:pPr>
             <a:r>
               <a:rPr lang="en-US" sz="1300" b="1" dirty="0">
                 <a:solidFill>
@@ -16302,12 +16170,6 @@
               </a:rPr>
               <a:t>Teacher projects: </a:t>
             </a:r>
-            <a:pPr algn="l" indent="0" marL="0">
-              <a:lnSpc>
-                <a:spcPts val="1595"/>
-              </a:lnSpc>
-              <a:buNone/>
-            </a:pPr>
             <a:r>
               <a:rPr lang="en-US" sz="1100" b="1" dirty="0">
                 <a:solidFill>
@@ -16319,12 +16181,6 @@
               </a:rPr>
               <a:t>一个猫</a:t>
             </a:r>
-            <a:pPr algn="l" indent="0" marL="0">
-              <a:lnSpc>
-                <a:spcPts val="1595"/>
-              </a:lnSpc>
-              <a:buNone/>
-            </a:pPr>
             <a:r>
               <a:rPr lang="en-US" sz="1100" dirty="0">
                 <a:solidFill>
@@ -16336,12 +16192,6 @@
               </a:rPr>
               <a:t> vs </a:t>
             </a:r>
-            <a:pPr algn="l" indent="0" marL="0">
-              <a:lnSpc>
-                <a:spcPts val="1595"/>
-              </a:lnSpc>
-              <a:buNone/>
-            </a:pPr>
             <a:r>
               <a:rPr lang="en-US" sz="1100" b="1" dirty="0">
                 <a:solidFill>
@@ -16353,12 +16203,6 @@
               </a:rPr>
               <a:t>一只猫</a:t>
             </a:r>
-            <a:pPr algn="l" indent="0" marL="0">
-              <a:lnSpc>
-                <a:spcPts val="1595"/>
-              </a:lnSpc>
-              <a:buNone/>
-            </a:pPr>
             <a:r>
               <a:rPr lang="en-US" sz="1100" dirty="0">
                 <a:solidFill>
@@ -16925,9 +16769,6 @@
               </a:rPr>
               <a:t>Gesture Check — 哪个对？ </a:t>
             </a:r>
-            <a:pPr algn="l" indent="0" marL="0">
-              <a:buNone/>
-            </a:pPr>
             <a:r>
               <a:rPr lang="en-US" sz="1400" b="1" dirty="0">
                 <a:solidFill>
@@ -16939,9 +16780,6 @@
               </a:rPr>
               <a:t>一个猫</a:t>
             </a:r>
-            <a:pPr algn="l" indent="0" marL="0">
-              <a:buNone/>
-            </a:pPr>
             <a:r>
               <a:rPr lang="en-US" sz="1400" dirty="0">
                 <a:solidFill>
@@ -17028,9 +16866,6 @@
               </a:rPr>
               <a:t>✅ 一</a:t>
             </a:r>
-            <a:pPr algn="l" indent="0" marL="0">
-              <a:buNone/>
-            </a:pPr>
             <a:r>
               <a:rPr lang="en-US" sz="2600" b="1" u="sng" dirty="0">
                 <a:solidFill>
@@ -17042,9 +16877,6 @@
               </a:rPr>
               <a:t>只</a:t>
             </a:r>
-            <a:pPr algn="l" indent="0" marL="0">
-              <a:buNone/>
-            </a:pPr>
             <a:r>
               <a:rPr lang="en-US" sz="2600" dirty="0">
                 <a:solidFill>
@@ -17098,12 +16930,6 @@
               </a:rPr>
               <a:t>个 → </a:t>
             </a:r>
-            <a:pPr algn="l" indent="0" marL="0">
-              <a:spcBef>
-                <a:spcPts val="600"/>
-              </a:spcBef>
-              <a:buNone/>
-            </a:pPr>
             <a:r>
               <a:rPr lang="en-US" sz="1200" b="1" dirty="0">
                 <a:solidFill>
@@ -17115,12 +16941,6 @@
               </a:rPr>
               <a:t>只</a:t>
             </a:r>
-            <a:pPr algn="l" indent="0" marL="0">
-              <a:spcBef>
-                <a:spcPts val="600"/>
-              </a:spcBef>
-              <a:buNone/>
-            </a:pPr>
             <a:r>
               <a:rPr lang="en-US" sz="1200" dirty="0">
                 <a:solidFill>
@@ -17465,9 +17285,6 @@
               </a:rPr>
               <a:t>活动4 · 听力理解一 </a:t>
             </a:r>
-            <a:pPr algn="l" indent="0" marL="0">
-              <a:buNone/>
-            </a:pPr>
             <a:r>
               <a:rPr lang="en-US" sz="1300" b="1" dirty="0">
                 <a:solidFill>
@@ -17672,12 +17489,6 @@
               </a:rPr>
               <a:t>Draw a </a:t>
             </a:r>
-            <a:pPr algn="l" indent="0" marL="0">
-              <a:lnSpc>
-                <a:spcPts val="1283"/>
-              </a:lnSpc>
-              <a:buNone/>
-            </a:pPr>
             <a:r>
               <a:rPr lang="en-US" sz="950" b="1" dirty="0">
                 <a:solidFill>
@@ -17689,12 +17500,6 @@
               </a:rPr>
               <a:t>6-row answer grid</a:t>
             </a:r>
-            <a:pPr algn="l" indent="0" marL="0">
-              <a:lnSpc>
-                <a:spcPts val="1283"/>
-              </a:lnSpc>
-              <a:buNone/>
-            </a:pPr>
             <a:r>
               <a:rPr lang="en-US" sz="950" dirty="0">
                 <a:solidFill>
@@ -17748,12 +17553,6 @@
               </a:rPr>
               <a:t>Items 2–6 played </a:t>
             </a:r>
-            <a:pPr algn="l" indent="0" marL="0">
-              <a:lnSpc>
-                <a:spcPts val="1283"/>
-              </a:lnSpc>
-              <a:buNone/>
-            </a:pPr>
             <a:r>
               <a:rPr lang="en-US" sz="950" b="1" dirty="0">
                 <a:solidFill>
@@ -17765,12 +17564,6 @@
               </a:rPr>
               <a:t>one at a time</a:t>
             </a:r>
-            <a:pPr algn="l" indent="0" marL="0">
-              <a:lnSpc>
-                <a:spcPts val="1283"/>
-              </a:lnSpc>
-              <a:buNone/>
-            </a:pPr>
             <a:r>
               <a:rPr lang="en-US" sz="950" dirty="0">
                 <a:solidFill>
@@ -17803,12 +17596,6 @@
               </a:rPr>
               <a:t>Full track replayed </a:t>
             </a:r>
-            <a:pPr algn="l" indent="0" marL="0">
-              <a:lnSpc>
-                <a:spcPts val="1283"/>
-              </a:lnSpc>
-              <a:buNone/>
-            </a:pPr>
             <a:r>
               <a:rPr lang="en-US" sz="950" b="1" dirty="0">
                 <a:solidFill>
@@ -17820,12 +17607,6 @@
               </a:rPr>
               <a:t>once more, no pausing</a:t>
             </a:r>
-            <a:pPr algn="l" indent="0" marL="0">
-              <a:lnSpc>
-                <a:spcPts val="1283"/>
-              </a:lnSpc>
-              <a:buNone/>
-            </a:pPr>
             <a:r>
               <a:rPr lang="en-US" sz="950" dirty="0">
                 <a:solidFill>
@@ -17858,12 +17639,6 @@
               </a:rPr>
               <a:t>Answers revealed on projector — </a:t>
             </a:r>
-            <a:pPr algn="l" indent="0" marL="0">
-              <a:lnSpc>
-                <a:spcPts val="1283"/>
-              </a:lnSpc>
-              <a:buNone/>
-            </a:pPr>
             <a:r>
               <a:rPr lang="en-US" sz="950" b="1" dirty="0">
                 <a:solidFill>
@@ -18129,12 +17904,6 @@
               </a:rPr>
               <a:t>Six items about </a:t>
             </a:r>
-            <a:pPr algn="l" indent="0" marL="0">
-              <a:lnSpc>
-                <a:spcPts val="1470"/>
-              </a:lnSpc>
-              <a:buNone/>
-            </a:pPr>
             <a:r>
               <a:rPr lang="en-US" sz="1050" b="1" dirty="0">
                 <a:solidFill>
@@ -18146,12 +17915,6 @@
               </a:rPr>
               <a:t>school layout</a:t>
             </a:r>
-            <a:pPr algn="l" indent="0" marL="0">
-              <a:lnSpc>
-                <a:spcPts val="1470"/>
-              </a:lnSpc>
-              <a:buNone/>
-            </a:pPr>
             <a:r>
               <a:rPr lang="en-US" sz="1050" dirty="0">
                 <a:solidFill>
@@ -18283,12 +18046,6 @@
               </a:rPr>
               <a:t>Every student ticks all 6 items </a:t>
             </a:r>
-            <a:pPr algn="l" indent="0" marL="0">
-              <a:lnSpc>
-                <a:spcPts val="1470"/>
-              </a:lnSpc>
-              <a:buNone/>
-            </a:pPr>
             <a:r>
               <a:rPr lang="en-US" sz="1050" b="1" dirty="0">
                 <a:solidFill>
@@ -18300,12 +18057,6 @@
               </a:rPr>
               <a:t>independently</a:t>
             </a:r>
-            <a:pPr algn="l" indent="0" marL="0">
-              <a:lnSpc>
-                <a:spcPts val="1470"/>
-              </a:lnSpc>
-              <a:buNone/>
-            </a:pPr>
             <a:r>
               <a:rPr lang="en-US" sz="1050" dirty="0">
                 <a:solidFill>
@@ -18998,9 +18749,6 @@
               </a:rPr>
               <a:t>活动10 · 听力理解二 + 量词小测 </a:t>
             </a:r>
-            <a:pPr algn="l" indent="0" marL="0">
-              <a:buNone/>
-            </a:pPr>
             <a:r>
               <a:rPr lang="en-US" sz="1250" b="1" dirty="0">
                 <a:solidFill>
@@ -19205,12 +18953,6 @@
               </a:rPr>
               <a:t>Draw a </a:t>
             </a:r>
-            <a:pPr algn="l" indent="0" marL="0">
-              <a:lnSpc>
-                <a:spcPts val="1283"/>
-              </a:lnSpc>
-              <a:buNone/>
-            </a:pPr>
             <a:r>
               <a:rPr lang="en-US" sz="950" b="1" dirty="0">
                 <a:solidFill>
@@ -19222,12 +18964,6 @@
               </a:rPr>
               <a:t>fresh 6-row answer grid</a:t>
             </a:r>
-            <a:pPr algn="l" indent="0" marL="0">
-              <a:lnSpc>
-                <a:spcPts val="1283"/>
-              </a:lnSpc>
-              <a:buNone/>
-            </a:pPr>
             <a:r>
               <a:rPr lang="en-US" sz="950" dirty="0">
                 <a:solidFill>
@@ -19260,12 +18996,6 @@
               </a:rPr>
               <a:t>Play track </a:t>
             </a:r>
-            <a:pPr algn="l" indent="0" marL="0">
-              <a:lnSpc>
-                <a:spcPts val="1283"/>
-              </a:lnSpc>
-              <a:buNone/>
-            </a:pPr>
             <a:r>
               <a:rPr lang="en-US" sz="950" b="1" dirty="0">
                 <a:solidFill>
@@ -19277,12 +19007,6 @@
               </a:rPr>
               <a:t>straight through once</a:t>
             </a:r>
-            <a:pPr algn="l" indent="0" marL="0">
-              <a:lnSpc>
-                <a:spcPts val="1283"/>
-              </a:lnSpc>
-              <a:buNone/>
-            </a:pPr>
             <a:r>
               <a:rPr lang="en-US" sz="950" dirty="0">
                 <a:solidFill>
@@ -19315,12 +19039,6 @@
               </a:rPr>
               <a:t>Play </a:t>
             </a:r>
-            <a:pPr algn="l" indent="0" marL="0">
-              <a:lnSpc>
-                <a:spcPts val="1283"/>
-              </a:lnSpc>
-              <a:buNone/>
-            </a:pPr>
             <a:r>
               <a:rPr lang="en-US" sz="950" b="1" dirty="0">
                 <a:solidFill>
@@ -19332,12 +19050,6 @@
               </a:rPr>
               <a:t>once more</a:t>
             </a:r>
-            <a:pPr algn="l" indent="0" marL="0">
-              <a:lnSpc>
-                <a:spcPts val="1283"/>
-              </a:lnSpc>
-              <a:buNone/>
-            </a:pPr>
             <a:r>
               <a:rPr lang="en-US" sz="950" dirty="0">
                 <a:solidFill>
@@ -19370,12 +19082,6 @@
               </a:rPr>
               <a:t>Answers revealed — </a:t>
             </a:r>
-            <a:pPr algn="l" indent="0" marL="0">
-              <a:lnSpc>
-                <a:spcPts val="1283"/>
-              </a:lnSpc>
-              <a:buNone/>
-            </a:pPr>
             <a:r>
               <a:rPr lang="en-US" sz="950" b="1" dirty="0">
                 <a:solidFill>
